--- a/weekly_presentations/week05_engine_milestone1.pptx
+++ b/weekly_presentations/week05_engine_milestone1.pptx
@@ -10,6 +10,10 @@
     <p:sldId id="258" r:id="rId9"/>
     <p:sldId id="259" r:id="rId10"/>
     <p:sldId id="260" r:id="rId11"/>
+    <p:sldId id="261" r:id="rId12"/>
+    <p:sldId id="262" r:id="rId13"/>
+    <p:sldId id="263" r:id="rId14"/>
+    <p:sldId id="264" r:id="rId15"/>
   </p:sldIdLst>
   <p:sldSz cx="12191695" cy="6858000" type="screen4x3"/>
   <p:notesSz cx="6858000" cy="9144000"/>
@@ -3182,7 +3186,7 @@
           <a:lstStyle/>
           <a:p>
             <a:r>
-              <a:rPr sz="3200" b="1" i="0">
+              <a:rPr sz="3000" b="1" i="0">
                 <a:solidFill>
                   <a:srgbClr val="990000"/>
                 </a:solidFill>
@@ -3193,7 +3197,7 @@
           </a:p>
           <a:p>
             <a:r>
-              <a:rPr sz="1900" b="0" i="1">
+              <a:rPr sz="1800" b="0" i="1">
                 <a:solidFill>
                   <a:srgbClr val="6D6D6D"/>
                 </a:solidFill>
@@ -3235,49 +3239,6 @@
               </a:rPr>
               <a:t>Optimal Market Making for Cryptocurrency Options  ·  NC State University</a:t>
             </a:r>
-          </a:p>
-        </p:txBody>
-      </p:sp>
-      <p:sp>
-        <p:nvSpPr>
-          <p:cNvPr id="6" name="Rectangle 5"/>
-          <p:cNvSpPr/>
-          <p:nvPr/>
-        </p:nvSpPr>
-        <p:spPr>
-          <a:xfrm>
-            <a:off x="548640" y="5394960"/>
-            <a:ext cx="3657600" cy="38100"/>
-          </a:xfrm>
-          <a:prstGeom prst="rect">
-            <a:avLst/>
-          </a:prstGeom>
-          <a:solidFill>
-            <a:srgbClr val="CC0000"/>
-          </a:solidFill>
-          <a:ln>
-            <a:noFill/>
-          </a:ln>
-        </p:spPr>
-        <p:style>
-          <a:lnRef idx="1">
-            <a:schemeClr val="accent1"/>
-          </a:lnRef>
-          <a:fillRef idx="3">
-            <a:schemeClr val="accent1"/>
-          </a:fillRef>
-          <a:effectRef idx="2">
-            <a:schemeClr val="accent1"/>
-          </a:effectRef>
-          <a:fontRef idx="minor">
-            <a:schemeClr val="lt1"/>
-          </a:fontRef>
-        </p:style>
-        <p:txBody>
-          <a:bodyPr rtlCol="0" anchor="ctr"/>
-          <a:lstStyle/>
-          <a:p>
-            <a:pPr algn="ctr"/>
           </a:p>
         </p:txBody>
       </p:sp>
@@ -3340,13 +3301,13 @@
           <a:noFill/>
         </p:spPr>
         <p:txBody>
-          <a:bodyPr wrap="none">
+          <a:bodyPr wrap="square">
             <a:spAutoFit/>
           </a:bodyPr>
           <a:lstStyle/>
           <a:p>
             <a:r>
-              <a:rPr sz="2600" b="1" i="0">
+              <a:rPr sz="2400" b="1" i="0">
                 <a:solidFill>
                   <a:srgbClr val="990000"/>
                 </a:solidFill>
@@ -3365,8 +3326,8 @@
         </p:nvSpPr>
         <p:spPr>
           <a:xfrm>
-            <a:off x="457200" y="1234440"/>
-            <a:ext cx="11247120" cy="31750"/>
+            <a:off x="457200" y="1371600"/>
+            <a:ext cx="11247120" cy="27940"/>
           </a:xfrm>
           <a:prstGeom prst="rect">
             <a:avLst/>
@@ -3408,7 +3369,7 @@
         </p:nvSpPr>
         <p:spPr>
           <a:xfrm>
-            <a:off x="640080" y="1554480"/>
+            <a:off x="640080" y="1600200"/>
             <a:ext cx="10972800" cy="4937760"/>
           </a:xfrm>
           <a:prstGeom prst="rect">
@@ -3424,49 +3385,49 @@
           <a:p>
             <a:pPr>
               <a:spcAft>
-                <a:spcPts val="1000"/>
+                <a:spcPts val="800"/>
               </a:spcAft>
             </a:pPr>
             <a:r>
-              <a:rPr sz="1900" b="0" i="0">
+              <a:rPr sz="1700" b="0" i="0">
                 <a:solidFill>
                   <a:srgbClr val="1A1A1A"/>
                 </a:solidFill>
                 <a:latin typeface="Arial"/>
               </a:rPr>
-              <a:t>•  Implement the quotes as a clean, tested PyTorch engine</a:t>
+              <a:t>•  Implement the quotes as a tested PyTorch engine</a:t>
             </a:r>
           </a:p>
           <a:p>
             <a:pPr>
               <a:spcAft>
-                <a:spcPts val="1000"/>
+                <a:spcPts val="800"/>
               </a:spcAft>
             </a:pPr>
             <a:r>
-              <a:rPr sz="1900" b="0" i="0">
+              <a:rPr sz="1700" b="0" i="0">
                 <a:solidFill>
                   <a:srgbClr val="1A1A1A"/>
                 </a:solidFill>
                 <a:latin typeface="Arial"/>
               </a:rPr>
-              <a:t>•  Calibrate the order-flow intensities by maximum likelihood</a:t>
+              <a:t>•  Calibrate the fill intensities by maximum likelihood</a:t>
             </a:r>
           </a:p>
           <a:p>
             <a:pPr>
               <a:spcAft>
-                <a:spcPts val="1000"/>
+                <a:spcPts val="800"/>
               </a:spcAft>
             </a:pPr>
             <a:r>
-              <a:rPr sz="1900" b="0" i="0">
+              <a:rPr sz="1700" b="0" i="0">
                 <a:solidFill>
                   <a:srgbClr val="1A1A1A"/>
                 </a:solidFill>
                 <a:latin typeface="Arial"/>
               </a:rPr>
-              <a:t>•  Build an event-driven backtest and benchmark on Coincall data</a:t>
+              <a:t>•  Backtest on one month of Coincall BTC-PERP data</a:t>
             </a:r>
           </a:p>
         </p:txBody>
@@ -3530,13 +3491,13 @@
           <a:noFill/>
         </p:spPr>
         <p:txBody>
-          <a:bodyPr wrap="none">
+          <a:bodyPr wrap="square">
             <a:spAutoFit/>
           </a:bodyPr>
           <a:lstStyle/>
           <a:p>
             <a:r>
-              <a:rPr sz="2600" b="1" i="0">
+              <a:rPr sz="2400" b="1" i="0">
                 <a:solidFill>
                   <a:srgbClr val="990000"/>
                 </a:solidFill>
@@ -3555,8 +3516,8 @@
         </p:nvSpPr>
         <p:spPr>
           <a:xfrm>
-            <a:off x="457200" y="1234440"/>
-            <a:ext cx="11247120" cy="31750"/>
+            <a:off x="457200" y="1371600"/>
+            <a:ext cx="11247120" cy="27940"/>
           </a:xfrm>
           <a:prstGeom prst="rect">
             <a:avLst/>
@@ -3598,7 +3559,7 @@
         </p:nvSpPr>
         <p:spPr>
           <a:xfrm>
-            <a:off x="640080" y="1554480"/>
+            <a:off x="640080" y="1600200"/>
             <a:ext cx="10972800" cy="4937760"/>
           </a:xfrm>
           <a:prstGeom prst="rect">
@@ -3614,65 +3575,49 @@
           <a:p>
             <a:pPr>
               <a:spcAft>
-                <a:spcPts val="1000"/>
+                <a:spcPts val="800"/>
               </a:spcAft>
             </a:pPr>
             <a:r>
-              <a:rPr sz="1900" b="0" i="0">
+              <a:rPr sz="1700" b="0" i="0">
                 <a:solidFill>
                   <a:srgbClr val="1A1A1A"/>
                 </a:solidFill>
                 <a:latin typeface="Arial"/>
               </a:rPr>
-              <a:t>•  Engine architecture; state management from the L2 book</a:t>
+              <a:t>•  Engine architecture; state from the L2 book</a:t>
             </a:r>
           </a:p>
           <a:p>
             <a:pPr>
               <a:spcAft>
-                <a:spcPts val="1000"/>
+                <a:spcPts val="800"/>
               </a:spcAft>
             </a:pPr>
             <a:r>
-              <a:rPr sz="1900" b="0" i="0">
+              <a:rPr sz="1700" b="0" i="0">
                 <a:solidFill>
                   <a:srgbClr val="1A1A1A"/>
                 </a:solidFill>
                 <a:latin typeface="Arial"/>
               </a:rPr>
-              <a:t>•  Mapping continuous-time quantities to discrete events</a:t>
+              <a:t>•  Map continuous-time quantities to discrete events</a:t>
             </a:r>
           </a:p>
           <a:p>
             <a:pPr>
               <a:spcAft>
-                <a:spcPts val="1000"/>
+                <a:spcPts val="800"/>
               </a:spcAft>
             </a:pPr>
             <a:r>
-              <a:rPr sz="1900" b="0" i="0">
+              <a:rPr sz="1700" b="0" i="0">
                 <a:solidFill>
                   <a:srgbClr val="1A1A1A"/>
                 </a:solidFill>
                 <a:latin typeface="Arial"/>
               </a:rPr>
-              <a:t>•  Calibrating lambda(d) = A exp(-kappa d) from fill data</a:t>
-            </a:r>
-          </a:p>
-          <a:p>
-            <a:pPr>
-              <a:spcAft>
-                <a:spcPts val="1000"/>
-              </a:spcAft>
-            </a:pPr>
-            <a:r>
-              <a:rPr sz="1900" b="0" i="0">
-                <a:solidFill>
-                  <a:srgbClr val="1A1A1A"/>
-                </a:solidFill>
-                <a:latin typeface="Arial"/>
-              </a:rPr>
-              <a:t>•  Pitfalls: units, cash-process sign, inventory indexing</a:t>
+              <a:t>•  Calibrate lambda(delta) = A exp(-kappa delta) from fills</a:t>
             </a:r>
           </a:p>
         </p:txBody>
@@ -3736,13 +3681,13 @@
           <a:noFill/>
         </p:spPr>
         <p:txBody>
-          <a:bodyPr wrap="none">
+          <a:bodyPr wrap="square">
             <a:spAutoFit/>
           </a:bodyPr>
           <a:lstStyle/>
           <a:p>
             <a:r>
-              <a:rPr sz="2600" b="1" i="0">
+              <a:rPr sz="2400" b="1" i="0">
                 <a:solidFill>
                   <a:srgbClr val="990000"/>
                 </a:solidFill>
@@ -3761,8 +3706,8 @@
         </p:nvSpPr>
         <p:spPr>
           <a:xfrm>
-            <a:off x="457200" y="1234440"/>
-            <a:ext cx="11247120" cy="31750"/>
+            <a:off x="457200" y="1371600"/>
+            <a:ext cx="11247120" cy="27940"/>
           </a:xfrm>
           <a:prstGeom prst="rect">
             <a:avLst/>
@@ -3804,7 +3749,7 @@
         </p:nvSpPr>
         <p:spPr>
           <a:xfrm>
-            <a:off x="640080" y="1554480"/>
+            <a:off x="640080" y="1600200"/>
             <a:ext cx="10972800" cy="4937760"/>
           </a:xfrm>
           <a:prstGeom prst="rect">
@@ -3820,11 +3765,11 @@
           <a:p>
             <a:pPr>
               <a:spcAft>
-                <a:spcPts val="1000"/>
+                <a:spcPts val="800"/>
               </a:spcAft>
             </a:pPr>
             <a:r>
-              <a:rPr sz="1900" b="0" i="0">
+              <a:rPr sz="1700" b="0" i="0">
                 <a:solidFill>
                   <a:srgbClr val="1A1A1A"/>
                 </a:solidFill>
@@ -3836,43 +3781,27 @@
           <a:p>
             <a:pPr>
               <a:spcAft>
-                <a:spcPts val="1000"/>
+                <a:spcPts val="800"/>
               </a:spcAft>
             </a:pPr>
             <a:r>
-              <a:rPr sz="1900" b="0" i="0">
+              <a:rPr sz="1700" b="0" i="0">
                 <a:solidFill>
                   <a:srgbClr val="1A1A1A"/>
                 </a:solidFill>
                 <a:latin typeface="Arial"/>
               </a:rPr>
-              <a:t>•  The backtest harness: replay, fill simulator, P&amp;L attribution</a:t>
+              <a:t>•  Replay engine + fill simulator + P&amp;L attribution</a:t>
             </a:r>
           </a:p>
           <a:p>
             <a:pPr>
               <a:spcAft>
-                <a:spcPts val="1000"/>
+                <a:spcPts val="800"/>
               </a:spcAft>
             </a:pPr>
             <a:r>
-              <a:rPr sz="1900" b="0" i="0">
-                <a:solidFill>
-                  <a:srgbClr val="1A1A1A"/>
-                </a:solidFill>
-                <a:latin typeface="Arial"/>
-              </a:rPr>
-              <a:t>•  Validate the P&amp;L distribution against theory</a:t>
-            </a:r>
-          </a:p>
-          <a:p>
-            <a:pPr>
-              <a:spcAft>
-                <a:spcPts val="1000"/>
-              </a:spcAft>
-            </a:pPr>
-            <a:r>
-              <a:rPr sz="1900" b="0" i="0">
+              <a:rPr sz="1700" b="0" i="0">
                 <a:solidFill>
                   <a:srgbClr val="1A1A1A"/>
                 </a:solidFill>
@@ -3917,7 +3846,7 @@
         </p:blipFill>
         <p:spPr>
           <a:xfrm>
-            <a:off x="9784080" y="274320"/>
+            <a:off x="9784080" y="228600"/>
             <a:ext cx="2011680" cy="316653"/>
           </a:xfrm>
           <a:prstGeom prst="rect">
@@ -3933,8 +3862,8 @@
         </p:nvSpPr>
         <p:spPr>
           <a:xfrm>
-            <a:off x="457200" y="457200"/>
-            <a:ext cx="8961120" cy="822960"/>
+            <a:off x="457200" y="411480"/>
+            <a:ext cx="8961120" cy="731520"/>
           </a:xfrm>
           <a:prstGeom prst="rect">
             <a:avLst/>
@@ -3948,13 +3877,124 @@
           <a:lstStyle/>
           <a:p>
             <a:r>
-              <a:rPr sz="2600" b="1" i="0">
+              <a:rPr sz="2200" b="1" i="0">
                 <a:solidFill>
                   <a:srgbClr val="990000"/>
                 </a:solidFill>
                 <a:latin typeface="Arial"/>
               </a:rPr>
-              <a:t>Milestone 1 Deliverable</a:t>
+              <a:t>Illustration</a:t>
+            </a:r>
+          </a:p>
+        </p:txBody>
+      </p:sp>
+      <p:pic>
+        <p:nvPicPr>
+          <p:cNvPr id="4" name="Picture 3" descr="week05.png"/>
+          <p:cNvPicPr>
+            <a:picLocks noChangeAspect="1"/>
+          </p:cNvPicPr>
+          <p:nvPr/>
+        </p:nvPicPr>
+        <p:blipFill>
+          <a:blip r:embed="rId3"/>
+          <a:stretch>
+            <a:fillRect/>
+          </a:stretch>
+        </p:blipFill>
+        <p:spPr>
+          <a:xfrm>
+            <a:off x="1280160" y="1371600"/>
+            <a:ext cx="9601200" cy="5225143"/>
+          </a:xfrm>
+          <a:prstGeom prst="rect">
+            <a:avLst/>
+          </a:prstGeom>
+        </p:spPr>
+      </p:pic>
+    </p:spTree>
+  </p:cSld>
+  <p:clrMapOvr>
+    <a:masterClrMapping/>
+  </p:clrMapOvr>
+</p:sld>
+</file>
+
+<file path=ppt/slides/slide6.xml><?xml version="1.0" encoding="utf-8"?>
+<p:sld xmlns:a="http://schemas.openxmlformats.org/drawingml/2006/main" xmlns:p="http://schemas.openxmlformats.org/presentationml/2006/main" xmlns:r="http://schemas.openxmlformats.org/officeDocument/2006/relationships">
+  <p:cSld>
+    <p:spTree>
+      <p:nvGrpSpPr>
+        <p:cNvPr id="1" name=""/>
+        <p:cNvGrpSpPr/>
+        <p:nvPr/>
+      </p:nvGrpSpPr>
+      <p:grpSpPr/>
+      <p:pic>
+        <p:nvPicPr>
+          <p:cNvPr id="2" name="Picture 1" descr="ncsu_logo.png"/>
+          <p:cNvPicPr>
+            <a:picLocks noChangeAspect="1"/>
+          </p:cNvPicPr>
+          <p:nvPr/>
+        </p:nvPicPr>
+        <p:blipFill>
+          <a:blip r:embed="rId2"/>
+          <a:stretch>
+            <a:fillRect/>
+          </a:stretch>
+        </p:blipFill>
+        <p:spPr>
+          <a:xfrm>
+            <a:off x="9784080" y="274320"/>
+            <a:ext cx="2011680" cy="316653"/>
+          </a:xfrm>
+          <a:prstGeom prst="rect">
+            <a:avLst/>
+          </a:prstGeom>
+        </p:spPr>
+      </p:pic>
+      <p:sp>
+        <p:nvSpPr>
+          <p:cNvPr id="3" name="TextBox 2"/>
+          <p:cNvSpPr txBox="1"/>
+          <p:nvPr/>
+        </p:nvSpPr>
+        <p:spPr>
+          <a:xfrm>
+            <a:off x="457200" y="457200"/>
+            <a:ext cx="8961120" cy="822960"/>
+          </a:xfrm>
+          <a:prstGeom prst="rect">
+            <a:avLst/>
+          </a:prstGeom>
+          <a:noFill/>
+        </p:spPr>
+        <p:txBody>
+          <a:bodyPr wrap="square">
+            <a:spAutoFit/>
+          </a:bodyPr>
+          <a:lstStyle/>
+          <a:p>
+            <a:r>
+              <a:rPr sz="2400" b="1" i="0">
+                <a:solidFill>
+                  <a:srgbClr val="990000"/>
+                </a:solidFill>
+                <a:latin typeface="Arial"/>
+              </a:rPr>
+              <a:t>Key Equations &amp; Why We Choose Them</a:t>
+            </a:r>
+          </a:p>
+          <a:p>
+            <a:r>
+              <a:rPr sz="1300" b="0" i="1">
+                <a:solidFill>
+                  <a:srgbClr val="6D6D6D"/>
+                </a:solidFill>
+                <a:latin typeface="Arial"/>
+              </a:rPr>
+              <a:t>Full derivations in the PDF deck</a:t>
             </a:r>
           </a:p>
         </p:txBody>
@@ -3967,8 +4007,8 @@
         </p:nvSpPr>
         <p:spPr>
           <a:xfrm>
-            <a:off x="457200" y="1234440"/>
-            <a:ext cx="11247120" cy="31750"/>
+            <a:off x="457200" y="1371600"/>
+            <a:ext cx="11247120" cy="27940"/>
           </a:xfrm>
           <a:prstGeom prst="rect">
             <a:avLst/>
@@ -4010,7 +4050,7 @@
         </p:nvSpPr>
         <p:spPr>
           <a:xfrm>
-            <a:off x="640080" y="1554480"/>
+            <a:off x="640080" y="1600200"/>
             <a:ext cx="10972800" cy="4937760"/>
           </a:xfrm>
           <a:prstGeom prst="rect">
@@ -4026,65 +4066,742 @@
           <a:p>
             <a:pPr>
               <a:spcAft>
-                <a:spcPts val="1000"/>
+                <a:spcPts val="500"/>
               </a:spcAft>
             </a:pPr>
             <a:r>
-              <a:rPr sz="1900" b="0" i="0">
+              <a:rPr sz="1200" b="0" i="0">
+                <a:solidFill>
+                  <a:srgbClr val="1A1A1A"/>
+                </a:solidFill>
+                <a:latin typeface="Consolas"/>
+              </a:rPr>
+              <a:t>    \mathcal{L}(A,\kappa)=\prod_i \lambda(\delta_i)\,e^{-\lambda(\delta_i)\,\Delta t_i}</a:t>
+            </a:r>
+          </a:p>
+          <a:p>
+            <a:pPr>
+              <a:spcAft>
+                <a:spcPts val="500"/>
+              </a:spcAft>
+            </a:pPr>
+            <a:r>
+              <a:rPr sz="1200" b="0" i="0">
                 <a:solidFill>
                   <a:srgbClr val="1A1A1A"/>
                 </a:solidFill>
                 <a:latin typeface="Arial"/>
               </a:rPr>
-              <a:t>•  Python/PyTorch Avellaneda-Stoikov package on one linear asset</a:t>
+              <a:t>•  why: Fills are a (doubly stochastic) Poisson process, so the likelihood of the observed fills given quote distances $\delta_i$ is a product of Poisson densities. We fit by MAXIMUM LIKELIHOOD rather than least-squares because the data are event counts, not Gaussian residuals.</a:t>
             </a:r>
           </a:p>
           <a:p>
             <a:pPr>
               <a:spcAft>
-                <a:spcPts val="1000"/>
+                <a:spcPts val="500"/>
               </a:spcAft>
             </a:pPr>
             <a:r>
-              <a:rPr sz="1900" b="0" i="0">
+              <a:rPr sz="1200" b="0" i="0">
+                <a:solidFill>
+                  <a:srgbClr val="1A1A1A"/>
+                </a:solidFill>
+                <a:latin typeface="Consolas"/>
+              </a:rPr>
+              <a:t>    -\ln\mathcal{L} = \sum_i\big[\lambda(\delta_i)\Delta t_i - \ln\lambda(\delta_i)\big]</a:t>
+            </a:r>
+          </a:p>
+          <a:p>
+            <a:pPr>
+              <a:spcAft>
+                <a:spcPts val="500"/>
+              </a:spcAft>
+            </a:pPr>
+            <a:r>
+              <a:rPr sz="1200" b="0" i="0">
                 <a:solidFill>
                   <a:srgbClr val="1A1A1A"/>
                 </a:solidFill>
                 <a:latin typeface="Arial"/>
               </a:rPr>
-              <a:t>•  Calibration + simulation + one-month BTC-PERP backtest</a:t>
-            </a:r>
-          </a:p>
+              <a:t>•  why: Minimizing this negative log-likelihood is convex in $\ln A$ and well-behaved in $\kappa$; PyTorch autograd gives the gradients, so a few hundred Adam steps converge.</a:t>
+            </a:r>
+          </a:p>
+        </p:txBody>
+      </p:sp>
+    </p:spTree>
+  </p:cSld>
+  <p:clrMapOvr>
+    <a:masterClrMapping/>
+  </p:clrMapOvr>
+</p:sld>
+</file>
+
+<file path=ppt/slides/slide7.xml><?xml version="1.0" encoding="utf-8"?>
+<p:sld xmlns:a="http://schemas.openxmlformats.org/drawingml/2006/main" xmlns:p="http://schemas.openxmlformats.org/presentationml/2006/main" xmlns:r="http://schemas.openxmlformats.org/officeDocument/2006/relationships">
+  <p:cSld>
+    <p:spTree>
+      <p:nvGrpSpPr>
+        <p:cNvPr id="1" name=""/>
+        <p:cNvGrpSpPr/>
+        <p:nvPr/>
+      </p:nvGrpSpPr>
+      <p:grpSpPr/>
+      <p:pic>
+        <p:nvPicPr>
+          <p:cNvPr id="2" name="Picture 1" descr="ncsu_logo.png"/>
+          <p:cNvPicPr>
+            <a:picLocks noChangeAspect="1"/>
+          </p:cNvPicPr>
+          <p:nvPr/>
+        </p:nvPicPr>
+        <p:blipFill>
+          <a:blip r:embed="rId2"/>
+          <a:stretch>
+            <a:fillRect/>
+          </a:stretch>
+        </p:blipFill>
+        <p:spPr>
+          <a:xfrm>
+            <a:off x="9784080" y="274320"/>
+            <a:ext cx="2011680" cy="316653"/>
+          </a:xfrm>
+          <a:prstGeom prst="rect">
+            <a:avLst/>
+          </a:prstGeom>
+        </p:spPr>
+      </p:pic>
+      <p:sp>
+        <p:nvSpPr>
+          <p:cNvPr id="3" name="TextBox 2"/>
+          <p:cNvSpPr txBox="1"/>
+          <p:nvPr/>
+        </p:nvSpPr>
+        <p:spPr>
+          <a:xfrm>
+            <a:off x="457200" y="457200"/>
+            <a:ext cx="8961120" cy="822960"/>
+          </a:xfrm>
+          <a:prstGeom prst="rect">
+            <a:avLst/>
+          </a:prstGeom>
+          <a:noFill/>
+        </p:spPr>
+        <p:txBody>
+          <a:bodyPr wrap="square">
+            <a:spAutoFit/>
+          </a:bodyPr>
+          <a:lstStyle/>
+          <a:p>
+            <a:r>
+              <a:rPr sz="2400" b="1" i="0">
+                <a:solidFill>
+                  <a:srgbClr val="990000"/>
+                </a:solidFill>
+                <a:latin typeface="Arial"/>
+              </a:rPr>
+              <a:t>Getting the Data from Coincall</a:t>
+            </a:r>
+          </a:p>
+          <a:p>
+            <a:r>
+              <a:rPr sz="1300" b="0" i="1">
+                <a:solidFill>
+                  <a:srgbClr val="6D6D6D"/>
+                </a:solidFill>
+                <a:latin typeface="Arial"/>
+              </a:rPr>
+              <a:t>Cross-check exact paths at https://docs.coincall.com/</a:t>
+            </a:r>
+          </a:p>
+        </p:txBody>
+      </p:sp>
+      <p:sp>
+        <p:nvSpPr>
+          <p:cNvPr id="4" name="Rectangle 3"/>
+          <p:cNvSpPr/>
+          <p:nvPr/>
+        </p:nvSpPr>
+        <p:spPr>
+          <a:xfrm>
+            <a:off x="457200" y="1371600"/>
+            <a:ext cx="11247120" cy="27940"/>
+          </a:xfrm>
+          <a:prstGeom prst="rect">
+            <a:avLst/>
+          </a:prstGeom>
+          <a:solidFill>
+            <a:srgbClr val="CC0000"/>
+          </a:solidFill>
+          <a:ln>
+            <a:noFill/>
+          </a:ln>
+        </p:spPr>
+        <p:style>
+          <a:lnRef idx="1">
+            <a:schemeClr val="accent1"/>
+          </a:lnRef>
+          <a:fillRef idx="3">
+            <a:schemeClr val="accent1"/>
+          </a:fillRef>
+          <a:effectRef idx="2">
+            <a:schemeClr val="accent1"/>
+          </a:effectRef>
+          <a:fontRef idx="minor">
+            <a:schemeClr val="lt1"/>
+          </a:fontRef>
+        </p:style>
+        <p:txBody>
+          <a:bodyPr rtlCol="0" anchor="ctr"/>
+          <a:lstStyle/>
+          <a:p>
+            <a:pPr algn="ctr"/>
+          </a:p>
+        </p:txBody>
+      </p:sp>
+      <p:sp>
+        <p:nvSpPr>
+          <p:cNvPr id="5" name="TextBox 4"/>
+          <p:cNvSpPr txBox="1"/>
+          <p:nvPr/>
+        </p:nvSpPr>
+        <p:spPr>
+          <a:xfrm>
+            <a:off x="640080" y="1600200"/>
+            <a:ext cx="10972800" cy="4937760"/>
+          </a:xfrm>
+          <a:prstGeom prst="rect">
+            <a:avLst/>
+          </a:prstGeom>
+          <a:noFill/>
+        </p:spPr>
+        <p:txBody>
+          <a:bodyPr wrap="square">
+            <a:spAutoFit/>
+          </a:bodyPr>
+          <a:lstStyle/>
           <a:p>
             <a:pPr>
               <a:spcAft>
-                <a:spcPts val="1000"/>
+                <a:spcPts val="500"/>
               </a:spcAft>
             </a:pPr>
             <a:r>
-              <a:rPr sz="1900" b="0" i="0">
+              <a:rPr sz="1200" b="0" i="0">
                 <a:solidFill>
                   <a:srgbClr val="1A1A1A"/>
                 </a:solidFill>
                 <a:latin typeface="Arial"/>
               </a:rPr>
-              <a:t>•  Acceptance: quotes match closed form; P&amp;L within +/-50% of reference</a:t>
+              <a:t>•  Build the intensity-calibration set from trades vs. your quotes:</a:t>
             </a:r>
           </a:p>
           <a:p>
             <a:pPr>
               <a:spcAft>
-                <a:spcPts val="1000"/>
+                <a:spcPts val="500"/>
               </a:spcAft>
             </a:pPr>
             <a:r>
-              <a:rPr sz="1900" b="0" i="0">
+              <a:rPr sz="1200" b="0" i="0">
+                <a:solidFill>
+                  <a:srgbClr val="1A1A1A"/>
+                </a:solidFill>
+                <a:latin typeface="Consolas"/>
+              </a:rPr>
+              <a:t>    Trades:  GET /open/option/trade/lasttrade/v1/{symbol}  (or trade history)</a:t>
+            </a:r>
+          </a:p>
+          <a:p>
+            <a:pPr>
+              <a:spcAft>
+                <a:spcPts val="500"/>
+              </a:spcAft>
+            </a:pPr>
+            <a:r>
+              <a:rPr sz="1200" b="0" i="0">
+                <a:solidFill>
+                  <a:srgbClr val="1A1A1A"/>
+                </a:solidFill>
+                <a:latin typeface="Consolas"/>
+              </a:rPr>
+              <a:t>    Book:    GET /open/futures/order/orderbook/v1/{symbol}  for the mid</a:t>
+            </a:r>
+          </a:p>
+          <a:p>
+            <a:pPr>
+              <a:spcAft>
+                <a:spcPts val="500"/>
+              </a:spcAft>
+            </a:pPr>
+            <a:r>
+              <a:rPr sz="1200" b="0" i="0">
                 <a:solidFill>
                   <a:srgbClr val="1A1A1A"/>
                 </a:solidFill>
                 <a:latin typeface="Arial"/>
               </a:rPr>
-              <a:t>•  pytest coverage; report &lt;= 10 pages</a:t>
+              <a:t>•  Offline: coincall_btc_perp_trades_2025Q4.parquet + ..._l2_2025Q4.parquet</a:t>
+            </a:r>
+          </a:p>
+          <a:p>
+            <a:pPr>
+              <a:spcAft>
+                <a:spcPts val="500"/>
+              </a:spcAft>
+            </a:pPr>
+            <a:r>
+              <a:rPr sz="1200" b="0" i="0">
+                <a:solidFill>
+                  <a:srgbClr val="1A1A1A"/>
+                </a:solidFill>
+                <a:latin typeface="Arial"/>
+              </a:rPr>
+              <a:t>•  A pre-aggregated coincall_intensity_calibration_set.parquet is provided</a:t>
+            </a:r>
+          </a:p>
+          <a:p>
+            <a:pPr>
+              <a:spcAft>
+                <a:spcPts val="500"/>
+              </a:spcAft>
+            </a:pPr>
+            <a:r>
+              <a:rPr sz="1200" b="0" i="0">
+                <a:solidFill>
+                  <a:srgbClr val="1A1A1A"/>
+                </a:solidFill>
+                <a:latin typeface="Arial"/>
+              </a:rPr>
+              <a:t>•  delta_i = |fill price - mid at fill|; group fills by delta bucket for the MLE</a:t>
+            </a:r>
+          </a:p>
+        </p:txBody>
+      </p:sp>
+    </p:spTree>
+  </p:cSld>
+  <p:clrMapOvr>
+    <a:masterClrMapping/>
+  </p:clrMapOvr>
+</p:sld>
+</file>
+
+<file path=ppt/slides/slide8.xml><?xml version="1.0" encoding="utf-8"?>
+<p:sld xmlns:a="http://schemas.openxmlformats.org/drawingml/2006/main" xmlns:p="http://schemas.openxmlformats.org/presentationml/2006/main" xmlns:r="http://schemas.openxmlformats.org/officeDocument/2006/relationships">
+  <p:cSld>
+    <p:spTree>
+      <p:nvGrpSpPr>
+        <p:cNvPr id="1" name=""/>
+        <p:cNvGrpSpPr/>
+        <p:nvPr/>
+      </p:nvGrpSpPr>
+      <p:grpSpPr/>
+      <p:sp>
+        <p:nvSpPr>
+          <p:cNvPr id="2" name="TextBox 1"/>
+          <p:cNvSpPr txBox="1"/>
+          <p:nvPr/>
+        </p:nvSpPr>
+        <p:spPr>
+          <a:xfrm>
+            <a:off x="457200" y="365760"/>
+            <a:ext cx="11247120" cy="640080"/>
+          </a:xfrm>
+          <a:prstGeom prst="rect">
+            <a:avLst/>
+          </a:prstGeom>
+          <a:noFill/>
+        </p:spPr>
+        <p:txBody>
+          <a:bodyPr wrap="none">
+            <a:spAutoFit/>
+          </a:bodyPr>
+          <a:lstStyle/>
+          <a:p>
+            <a:r>
+              <a:rPr sz="1800" b="1" i="0">
+                <a:solidFill>
+                  <a:srgbClr val="990000"/>
+                </a:solidFill>
+                <a:latin typeface="Arial"/>
+              </a:rPr>
+              <a:t>Code — week5_calibrate.py -- intensity MLE with PyTorch autograd</a:t>
+            </a:r>
+          </a:p>
+        </p:txBody>
+      </p:sp>
+      <p:sp>
+        <p:nvSpPr>
+          <p:cNvPr id="3" name="Rectangle 2"/>
+          <p:cNvSpPr/>
+          <p:nvPr/>
+        </p:nvSpPr>
+        <p:spPr>
+          <a:xfrm>
+            <a:off x="457200" y="1097280"/>
+            <a:ext cx="11247120" cy="5394960"/>
+          </a:xfrm>
+          <a:prstGeom prst="rect">
+            <a:avLst/>
+          </a:prstGeom>
+          <a:solidFill>
+            <a:srgbClr val="F5F5F5"/>
+          </a:solidFill>
+          <a:ln w="9525">
+            <a:solidFill>
+              <a:srgbClr val="6D6D6D"/>
+            </a:solidFill>
+          </a:ln>
+        </p:spPr>
+        <p:style>
+          <a:lnRef idx="1">
+            <a:schemeClr val="accent1"/>
+          </a:lnRef>
+          <a:fillRef idx="3">
+            <a:schemeClr val="accent1"/>
+          </a:fillRef>
+          <a:effectRef idx="2">
+            <a:schemeClr val="accent1"/>
+          </a:effectRef>
+          <a:fontRef idx="minor">
+            <a:schemeClr val="lt1"/>
+          </a:fontRef>
+        </p:style>
+        <p:txBody>
+          <a:bodyPr rtlCol="0" anchor="ctr" wrap="square" lIns="182880" tIns="91440"/>
+          <a:lstStyle/>
+          <a:p>
+            <a:pPr algn="ctr">
+              <a:spcAft>
+                <a:spcPts val="0"/>
+              </a:spcAft>
+            </a:pPr>
+            <a:r>
+              <a:rPr sz="1100" b="0" i="0">
+                <a:solidFill>
+                  <a:srgbClr val="1A1A1A"/>
+                </a:solidFill>
+                <a:latin typeface="Consolas"/>
+              </a:rPr>
+              <a:t>import torch</a:t>
+            </a:r>
+          </a:p>
+          <a:p>
+            <a:pPr>
+              <a:spcAft>
+                <a:spcPts val="0"/>
+              </a:spcAft>
+            </a:pPr>
+            <a:r>
+              <a:rPr sz="1100" b="0" i="0">
+                <a:solidFill>
+                  <a:srgbClr val="1A1A1A"/>
+                </a:solidFill>
+                <a:latin typeface="Consolas"/>
+              </a:rPr>
+              <a:t># delta: quote distances at which fills occurred; dt: exposure time per fill</a:t>
+            </a:r>
+          </a:p>
+          <a:p>
+            <a:pPr>
+              <a:spcAft>
+                <a:spcPts val="0"/>
+              </a:spcAft>
+            </a:pPr>
+            <a:r>
+              <a:rPr sz="1100" b="0" i="0">
+                <a:solidFill>
+                  <a:srgbClr val="1A1A1A"/>
+                </a:solidFill>
+                <a:latin typeface="Consolas"/>
+              </a:rPr>
+              <a:t>delta = torch.tensor([...]); dt = torch.tensor([...])</a:t>
+            </a:r>
+          </a:p>
+          <a:p>
+            <a:pPr>
+              <a:spcAft>
+                <a:spcPts val="0"/>
+              </a:spcAft>
+            </a:pPr>
+            <a:r>
+              <a:rPr sz="1100" b="0" i="0">
+                <a:solidFill>
+                  <a:srgbClr val="1A1A1A"/>
+                </a:solidFill>
+                <a:latin typeface="Consolas"/>
+              </a:rPr>
+              <a:t>logA  = torch.zeros(1, requires_grad=True)</a:t>
+            </a:r>
+          </a:p>
+          <a:p>
+            <a:pPr>
+              <a:spcAft>
+                <a:spcPts val="0"/>
+              </a:spcAft>
+            </a:pPr>
+            <a:r>
+              <a:rPr sz="1100" b="0" i="0">
+                <a:solidFill>
+                  <a:srgbClr val="1A1A1A"/>
+                </a:solidFill>
+                <a:latin typeface="Consolas"/>
+              </a:rPr>
+              <a:t>kappa = torch.ones(1,  requires_grad=True)</a:t>
+            </a:r>
+          </a:p>
+          <a:p>
+            <a:pPr>
+              <a:spcAft>
+                <a:spcPts val="0"/>
+              </a:spcAft>
+            </a:pPr>
+            <a:r>
+              <a:rPr sz="1100" b="0" i="0">
+                <a:solidFill>
+                  <a:srgbClr val="1A1A1A"/>
+                </a:solidFill>
+                <a:latin typeface="Consolas"/>
+              </a:rPr>
+              <a:t>opt = torch.optim.Adam([logA, kappa], lr=0.05)</a:t>
+            </a:r>
+          </a:p>
+          <a:p>
+            <a:pPr>
+              <a:spcAft>
+                <a:spcPts val="0"/>
+              </a:spcAft>
+            </a:pPr>
+            <a:r>
+              <a:rPr sz="1100" b="0" i="0">
+                <a:solidFill>
+                  <a:srgbClr val="1A1A1A"/>
+                </a:solidFill>
+                <a:latin typeface="Consolas"/>
+              </a:rPr>
+              <a:t>for step in range(2000):</a:t>
+            </a:r>
+          </a:p>
+          <a:p>
+            <a:pPr>
+              <a:spcAft>
+                <a:spcPts val="0"/>
+              </a:spcAft>
+            </a:pPr>
+            <a:r>
+              <a:rPr sz="1100" b="0" i="0">
+                <a:solidFill>
+                  <a:srgbClr val="1A1A1A"/>
+                </a:solidFill>
+                <a:latin typeface="Consolas"/>
+              </a:rPr>
+              <a:t>    lam = torch.exp(logA) * torch.exp(-kappa.clamp(min=1e-3) * delta)</a:t>
+            </a:r>
+          </a:p>
+          <a:p>
+            <a:pPr>
+              <a:spcAft>
+                <a:spcPts val="0"/>
+              </a:spcAft>
+            </a:pPr>
+            <a:r>
+              <a:rPr sz="1100" b="0" i="0">
+                <a:solidFill>
+                  <a:srgbClr val="1A1A1A"/>
+                </a:solidFill>
+                <a:latin typeface="Consolas"/>
+              </a:rPr>
+              <a:t>    nll = (lam * dt - torch.log(lam)).sum()          # Poisson negative log-lik</a:t>
+            </a:r>
+          </a:p>
+          <a:p>
+            <a:pPr>
+              <a:spcAft>
+                <a:spcPts val="0"/>
+              </a:spcAft>
+            </a:pPr>
+            <a:r>
+              <a:rPr sz="1100" b="0" i="0">
+                <a:solidFill>
+                  <a:srgbClr val="1A1A1A"/>
+                </a:solidFill>
+                <a:latin typeface="Consolas"/>
+              </a:rPr>
+              <a:t>    opt.zero_grad(); nll.backward(); opt.step()</a:t>
+            </a:r>
+          </a:p>
+          <a:p>
+            <a:pPr>
+              <a:spcAft>
+                <a:spcPts val="0"/>
+              </a:spcAft>
+            </a:pPr>
+            <a:r>
+              <a:rPr sz="1100" b="0" i="0">
+                <a:solidFill>
+                  <a:srgbClr val="1A1A1A"/>
+                </a:solidFill>
+                <a:latin typeface="Consolas"/>
+              </a:rPr>
+              <a:t>print("A =", torch.exp(logA).item(), " kappa =", kappa.item())</a:t>
+            </a:r>
+          </a:p>
+        </p:txBody>
+      </p:sp>
+    </p:spTree>
+  </p:cSld>
+  <p:clrMapOvr>
+    <a:masterClrMapping/>
+  </p:clrMapOvr>
+</p:sld>
+</file>
+
+<file path=ppt/slides/slide9.xml><?xml version="1.0" encoding="utf-8"?>
+<p:sld xmlns:a="http://schemas.openxmlformats.org/drawingml/2006/main" xmlns:p="http://schemas.openxmlformats.org/presentationml/2006/main" xmlns:r="http://schemas.openxmlformats.org/officeDocument/2006/relationships">
+  <p:cSld>
+    <p:spTree>
+      <p:nvGrpSpPr>
+        <p:cNvPr id="1" name=""/>
+        <p:cNvGrpSpPr/>
+        <p:nvPr/>
+      </p:nvGrpSpPr>
+      <p:grpSpPr/>
+      <p:pic>
+        <p:nvPicPr>
+          <p:cNvPr id="2" name="Picture 1" descr="ncsu_logo.png"/>
+          <p:cNvPicPr>
+            <a:picLocks noChangeAspect="1"/>
+          </p:cNvPicPr>
+          <p:nvPr/>
+        </p:nvPicPr>
+        <p:blipFill>
+          <a:blip r:embed="rId2"/>
+          <a:stretch>
+            <a:fillRect/>
+          </a:stretch>
+        </p:blipFill>
+        <p:spPr>
+          <a:xfrm>
+            <a:off x="9784080" y="274320"/>
+            <a:ext cx="2011680" cy="316653"/>
+          </a:xfrm>
+          <a:prstGeom prst="rect">
+            <a:avLst/>
+          </a:prstGeom>
+        </p:spPr>
+      </p:pic>
+      <p:sp>
+        <p:nvSpPr>
+          <p:cNvPr id="3" name="TextBox 2"/>
+          <p:cNvSpPr txBox="1"/>
+          <p:nvPr/>
+        </p:nvSpPr>
+        <p:spPr>
+          <a:xfrm>
+            <a:off x="457200" y="457200"/>
+            <a:ext cx="8961120" cy="822960"/>
+          </a:xfrm>
+          <a:prstGeom prst="rect">
+            <a:avLst/>
+          </a:prstGeom>
+          <a:noFill/>
+        </p:spPr>
+        <p:txBody>
+          <a:bodyPr wrap="square">
+            <a:spAutoFit/>
+          </a:bodyPr>
+          <a:lstStyle/>
+          <a:p>
+            <a:r>
+              <a:rPr sz="2400" b="1" i="0">
+                <a:solidFill>
+                  <a:srgbClr val="990000"/>
+                </a:solidFill>
+                <a:latin typeface="Arial"/>
+              </a:rPr>
+              <a:t>Reading</a:t>
+            </a:r>
+          </a:p>
+        </p:txBody>
+      </p:sp>
+      <p:sp>
+        <p:nvSpPr>
+          <p:cNvPr id="4" name="Rectangle 3"/>
+          <p:cNvSpPr/>
+          <p:nvPr/>
+        </p:nvSpPr>
+        <p:spPr>
+          <a:xfrm>
+            <a:off x="457200" y="1371600"/>
+            <a:ext cx="11247120" cy="27940"/>
+          </a:xfrm>
+          <a:prstGeom prst="rect">
+            <a:avLst/>
+          </a:prstGeom>
+          <a:solidFill>
+            <a:srgbClr val="CC0000"/>
+          </a:solidFill>
+          <a:ln>
+            <a:noFill/>
+          </a:ln>
+        </p:spPr>
+        <p:style>
+          <a:lnRef idx="1">
+            <a:schemeClr val="accent1"/>
+          </a:lnRef>
+          <a:fillRef idx="3">
+            <a:schemeClr val="accent1"/>
+          </a:fillRef>
+          <a:effectRef idx="2">
+            <a:schemeClr val="accent1"/>
+          </a:effectRef>
+          <a:fontRef idx="minor">
+            <a:schemeClr val="lt1"/>
+          </a:fontRef>
+        </p:style>
+        <p:txBody>
+          <a:bodyPr rtlCol="0" anchor="ctr"/>
+          <a:lstStyle/>
+          <a:p>
+            <a:pPr algn="ctr"/>
+          </a:p>
+        </p:txBody>
+      </p:sp>
+      <p:sp>
+        <p:nvSpPr>
+          <p:cNvPr id="5" name="TextBox 4"/>
+          <p:cNvSpPr txBox="1"/>
+          <p:nvPr/>
+        </p:nvSpPr>
+        <p:spPr>
+          <a:xfrm>
+            <a:off x="640080" y="1600200"/>
+            <a:ext cx="10972800" cy="4937760"/>
+          </a:xfrm>
+          <a:prstGeom prst="rect">
+            <a:avLst/>
+          </a:prstGeom>
+          <a:noFill/>
+        </p:spPr>
+        <p:txBody>
+          <a:bodyPr wrap="square">
+            <a:spAutoFit/>
+          </a:bodyPr>
+          <a:lstStyle/>
+          <a:p>
+            <a:pPr>
+              <a:spcAft>
+                <a:spcPts val="800"/>
+              </a:spcAft>
+            </a:pPr>
+            <a:r>
+              <a:rPr sz="1700" b="0" i="0">
+                <a:solidFill>
+                  <a:srgbClr val="1A1A1A"/>
+                </a:solidFill>
+                <a:latin typeface="Arial"/>
+              </a:rPr>
+              <a:t>•  Avellaneda-Stoikov (2008) [implementation]; Gueant (2016), Ch. 4</a:t>
             </a:r>
           </a:p>
         </p:txBody>
